--- a/assets/powerpoints/module-n3-vetements/B3-taille-pointure-et-essayage.pptx
+++ b/assets/powerpoints/module-n3-vetements/B3-taille-pointure-et-essayage.pptx
@@ -10308,7 +10308,52 @@
                 </a:solidFill>
                 <a:latin typeface="Verdana"/>
               </a:rPr>
-              <a:t>&lt;b&gt;Quelle&lt;/b&gt; taille ? &lt;b&gt;Quelle&lt;/b&gt; couleur ? &lt;b&gt;Quel&lt;/b&gt; modèle ?</a:t>
+              <a:t>Quelle</a:t>
+            </a:r>
+            <a:r>
+              <a:rPr sz="3400" b="0" i="0">
+                <a:solidFill>
+                  <a:srgbClr val="17181A"/>
+                </a:solidFill>
+                <a:latin typeface="Verdana"/>
+              </a:rPr>
+              <a:t> taille ? </a:t>
+            </a:r>
+            <a:r>
+              <a:rPr sz="3400" b="1" i="0">
+                <a:solidFill>
+                  <a:srgbClr val="17181A"/>
+                </a:solidFill>
+                <a:latin typeface="Verdana"/>
+              </a:rPr>
+              <a:t>Quelle</a:t>
+            </a:r>
+            <a:r>
+              <a:rPr sz="3400" b="0" i="0">
+                <a:solidFill>
+                  <a:srgbClr val="17181A"/>
+                </a:solidFill>
+                <a:latin typeface="Verdana"/>
+              </a:rPr>
+              <a:t> couleur ? </a:t>
+            </a:r>
+            <a:r>
+              <a:rPr sz="3400" b="1" i="0">
+                <a:solidFill>
+                  <a:srgbClr val="17181A"/>
+                </a:solidFill>
+                <a:latin typeface="Verdana"/>
+              </a:rPr>
+              <a:t>Quel</a:t>
+            </a:r>
+            <a:r>
+              <a:rPr sz="3400" b="0" i="0">
+                <a:solidFill>
+                  <a:srgbClr val="17181A"/>
+                </a:solidFill>
+                <a:latin typeface="Verdana"/>
+              </a:rPr>
+              <a:t> modèle ?</a:t>
             </a:r>
           </a:p>
         </p:txBody>
@@ -10393,7 +10438,43 @@
                 </a:solidFill>
                 <a:latin typeface="Verdana"/>
               </a:rPr>
-              <a:t>Le mot s'accorde avec ce qui suit. Taille, couleur et pointure sont féminins : &lt;b&gt;quelle&lt;/b&gt;. Modèle et prix sont masculins : &lt;b&gt;quel&lt;/b&gt;. À l'oral, les deux formes se prononcent pareil — c'est à l'écrit que la différence compte.</a:t>
+              <a:t>Le mot s'accorde avec ce qui suit. Taille, couleur et pointure sont féminins : </a:t>
+            </a:r>
+            <a:r>
+              <a:rPr sz="2000" b="1" i="0">
+                <a:solidFill>
+                  <a:srgbClr val="4B4F52"/>
+                </a:solidFill>
+                <a:latin typeface="Verdana"/>
+              </a:rPr>
+              <a:t>quelle</a:t>
+            </a:r>
+            <a:r>
+              <a:rPr sz="2000" b="0" i="0">
+                <a:solidFill>
+                  <a:srgbClr val="4B4F52"/>
+                </a:solidFill>
+                <a:latin typeface="Verdana"/>
+              </a:rPr>
+              <a:t>. Modèle et prix sont masculins : </a:t>
+            </a:r>
+            <a:r>
+              <a:rPr sz="2000" b="1" i="0">
+                <a:solidFill>
+                  <a:srgbClr val="4B4F52"/>
+                </a:solidFill>
+                <a:latin typeface="Verdana"/>
+              </a:rPr>
+              <a:t>quel</a:t>
+            </a:r>
+            <a:r>
+              <a:rPr sz="2000" b="0" i="0">
+                <a:solidFill>
+                  <a:srgbClr val="4B4F52"/>
+                </a:solidFill>
+                <a:latin typeface="Verdana"/>
+              </a:rPr>
+              <a:t>. À l'oral, les deux formes se prononcent pareil — c'est à l'écrit que la différence compte.</a:t>
             </a:r>
           </a:p>
         </p:txBody>
@@ -10733,7 +10814,25 @@
                 </a:solidFill>
                 <a:latin typeface="Verdana"/>
               </a:rPr>
-              <a:t>« C'est trop &lt;b&gt;serré&lt;/b&gt; aux épaules. » Serré veut dire que le vêtement presse le corps.</a:t>
+              <a:t>« C'est trop </a:t>
+            </a:r>
+            <a:r>
+              <a:rPr sz="1800" b="1" i="0">
+                <a:solidFill>
+                  <a:srgbClr val="3A3D40"/>
+                </a:solidFill>
+                <a:latin typeface="Verdana"/>
+              </a:rPr>
+              <a:t>serré</a:t>
+            </a:r>
+            <a:r>
+              <a:rPr sz="1800" b="0" i="0">
+                <a:solidFill>
+                  <a:srgbClr val="3A3D40"/>
+                </a:solidFill>
+                <a:latin typeface="Verdana"/>
+              </a:rPr>
+              <a:t> aux épaules. » Serré veut dire que le vêtement presse le corps.</a:t>
             </a:r>
           </a:p>
         </p:txBody>
@@ -10857,7 +10956,25 @@
                 </a:solidFill>
                 <a:latin typeface="Verdana"/>
               </a:rPr>
-              <a:t>« C'est un peu &lt;b&gt;large&lt;/b&gt;. » Ou « c'est trop grand », qui se dit aussi.</a:t>
+              <a:t>« C'est un peu </a:t>
+            </a:r>
+            <a:r>
+              <a:rPr sz="1800" b="1" i="0">
+                <a:solidFill>
+                  <a:srgbClr val="3A3D40"/>
+                </a:solidFill>
+                <a:latin typeface="Verdana"/>
+              </a:rPr>
+              <a:t>large</a:t>
+            </a:r>
+            <a:r>
+              <a:rPr sz="1800" b="0" i="0">
+                <a:solidFill>
+                  <a:srgbClr val="3A3D40"/>
+                </a:solidFill>
+                <a:latin typeface="Verdana"/>
+              </a:rPr>
+              <a:t>. » Ou « c'est trop grand », qui se dit aussi.</a:t>
             </a:r>
           </a:p>
         </p:txBody>
@@ -10981,7 +11098,25 @@
                 </a:solidFill>
                 <a:latin typeface="Verdana"/>
               </a:rPr>
-              <a:t>« Les &lt;b&gt;manches&lt;/b&gt; sont trop longues. » Sur un pantalon, ce sont les jambes.</a:t>
+              <a:t>« Les </a:t>
+            </a:r>
+            <a:r>
+              <a:rPr sz="1800" b="1" i="0">
+                <a:solidFill>
+                  <a:srgbClr val="3A3D40"/>
+                </a:solidFill>
+                <a:latin typeface="Verdana"/>
+              </a:rPr>
+              <a:t>manches</a:t>
+            </a:r>
+            <a:r>
+              <a:rPr sz="1800" b="0" i="0">
+                <a:solidFill>
+                  <a:srgbClr val="3A3D40"/>
+                </a:solidFill>
+                <a:latin typeface="Verdana"/>
+              </a:rPr>
+              <a:t> sont trop longues. » Sur un pantalon, ce sont les jambes.</a:t>
             </a:r>
           </a:p>
         </p:txBody>
